--- a/docs/content/meeting_r/meeting_r_lecture.pptx
+++ b/docs/content/meeting_r/meeting_r_lecture.pptx
@@ -34,6 +34,8 @@
     <p:sldId id="282" r:id="rId28"/>
     <p:sldId id="283" r:id="rId29"/>
     <p:sldId id="284" r:id="rId30"/>
+    <p:sldId id="285" r:id="rId31"/>
+    <p:sldId id="286" r:id="rId32"/>
   </p:sldIdLst>
   <p:sldSz cx="9144000" cy="5143500" type="screen16x9"/>
   <p:notesSz cx="6858000" cy="9144000"/>
@@ -3368,7 +3370,7 @@
             </a:pPr>
             <a:r>
               <a:rPr/>
-              <a:t>2026-07-05</a:t>
+              <a:t>2026-08-27</a:t>
             </a:r>
           </a:p>
         </p:txBody>
@@ -3433,7 +3435,7 @@
             </a:r>
             <a:r>
               <a:rPr/>
-              <a:t> assignment operator - alligators eats minus sign</a:t>
+              <a:t> assignment operator - alligator eats the minus sign</a:t>
             </a:r>
           </a:p>
         </p:txBody>
@@ -3670,7 +3672,13 @@
             </a:r>
             <a:r>
               <a:rPr sz="2000"/>
-              <a:t> “puts the thing on right and stores it in the name on left.” not always the same as =</a:t>
+              <a:t> “puts the thing on right and stores it in the name on left.” Do not use </a:t>
+            </a:r>
+            <a:r>
+              <a:rPr sz="2000">
+                <a:latin typeface="Courier"/>
+              </a:rPr>
+              <a:t>=</a:t>
             </a:r>
           </a:p>
         </p:txBody>
@@ -3691,8 +3699,8 @@
         </p:blipFill>
         <p:spPr bwMode="auto">
           <a:xfrm>
-            <a:off x="4495800" y="787400"/>
-            <a:ext cx="4406900" cy="3556000"/>
+            <a:off x="4660900" y="660400"/>
+            <a:ext cx="4089400" cy="3302000"/>
           </a:xfrm>
           <a:prstGeom prst="rect">
             <a:avLst/>
@@ -3705,6 +3713,38 @@
           </a:ln>
         </p:spPr>
       </p:pic>
+      <p:sp>
+        <p:nvSpPr>
+          <p:cNvPr id="1" name="TextBox 3"/>
+          <p:cNvSpPr txBox="1"/>
+          <p:nvPr>
+            <p:ph idx="1"/>
+          </p:nvPr>
+        </p:nvSpPr>
+        <p:spPr>
+          <a:xfrm>
+            <a:off x="4495800" y="3962400"/>
+            <a:ext cx="4406900" cy="508000"/>
+          </a:xfrm>
+          <a:prstGeom prst="rect">
+            <a:avLst/>
+          </a:prstGeom>
+          <a:noFill/>
+        </p:spPr>
+        <p:txBody>
+          <a:bodyPr/>
+          <a:lstStyle/>
+          <a:p>
+            <a:pPr lvl="0" indent="0" marL="0" algn="ctr">
+              <a:buNone/>
+            </a:pPr>
+            <a:r>
+              <a:rPr/>
+              <a:t>Diagram of the assignment operator: an arrow from a value (7) on the right pointing left into a name (x), with the environment then showing x storing 7.</a:t>
+            </a:r>
+          </a:p>
+        </p:txBody>
+      </p:sp>
     </p:spTree>
   </p:cSld>
 </p:sld>
@@ -4280,7 +4320,17 @@
             </a:r>
             <a:r>
               <a:rPr sz="2000"/>
-              <a:t> you to use lower case and _</a:t>
+              <a:t> you to use lower case and underscores — </a:t>
+            </a:r>
+            <a:r>
+              <a:rPr sz="2000">
+                <a:latin typeface="Courier"/>
+              </a:rPr>
+              <a:t>lower_snake_case</a:t>
+            </a:r>
+            <a:r>
+              <a:rPr sz="2000"/>
+              <a:t>, always.</a:t>
             </a:r>
           </a:p>
         </p:txBody>
@@ -4349,7 +4399,7 @@
             <a:pPr lvl="1"/>
             <a:r>
               <a:rPr sz="2000"/>
-              <a:t>- data frames → </a:t>
+              <a:t>data frames → </a:t>
             </a:r>
             <a:r>
               <a:rPr sz="2000">
@@ -4362,7 +4412,7 @@
             <a:pPr lvl="1"/>
             <a:r>
               <a:rPr sz="2000"/>
-              <a:t>- plots → </a:t>
+              <a:t>plots → </a:t>
             </a:r>
             <a:r>
               <a:rPr sz="2000">
@@ -4375,13 +4425,56 @@
             <a:pPr lvl="1"/>
             <a:r>
               <a:rPr sz="2000"/>
-              <a:t>- models → </a:t>
+              <a:t>models → </a:t>
             </a:r>
             <a:r>
               <a:rPr sz="2000">
                 <a:latin typeface="Courier"/>
               </a:rPr>
               <a:t>_model</a:t>
+            </a:r>
+          </a:p>
+          <a:p>
+            <a:pPr lvl="0" indent="0" marL="1270000">
+              <a:buNone/>
+            </a:pPr>
+            <a:r>
+              <a:rPr sz="2000" b="1"/>
+              <a:t>Note</a:t>
+            </a:r>
+          </a:p>
+          <a:p>
+            <a:pPr lvl="0" indent="0" marL="1270000">
+              <a:buNone/>
+            </a:pPr>
+            <a:r>
+              <a:rPr sz="2000" b="1"/>
+              <a:t>📚 Reference</a:t>
+            </a:r>
+          </a:p>
+          <a:p>
+            <a:pPr lvl="0" indent="0" marL="1270000">
+              <a:buNone/>
+            </a:pPr>
+            <a:r>
+              <a:rPr sz="2000"/>
+              <a:t>R for Data Science (2e), Ch. 2 — </a:t>
+            </a:r>
+            <a:r>
+              <a:rPr sz="2000" i="1"/>
+              <a:t>Workflow: basics</a:t>
+            </a:r>
+            <a:r>
+              <a:rPr sz="2000"/>
+              <a:t> (naming, calling functions) and Ch. 4 — </a:t>
+            </a:r>
+            <a:r>
+              <a:rPr sz="2000" i="1"/>
+              <a:t>Workflow: code style</a:t>
+            </a:r>
+            <a:r>
+              <a:rPr sz="2000"/>
+              <a:t> (spacing, pipes). Short chapters — worth reading both.</a:t>
             </a:r>
           </a:p>
         </p:txBody>
@@ -4642,7 +4735,7 @@
             <a:pPr lvl="0"/>
             <a:r>
               <a:rPr/>
-              <a:t>Shortcut to toggle: Ctrl/Cmd + Shift + C</a:t>
+              <a:t>Shortcut to toggle: Ctrl/Cmd + Shift + C - this can be modified</a:t>
             </a:r>
           </a:p>
           <a:p>
@@ -4760,11 +4853,8 @@
         <p:spPr>
           <a:xfrm>
             <a:off x="0" y="0"/>
-            <a:ext cx="9144000" cy="602780"/>
+            <a:ext cx="9144000" cy="582780"/>
           </a:xfrm>
-          <a:solidFill>
-            <a:srgbClr val="1A1A2E"/>
-          </a:solidFill>
         </p:spPr>
         <p:txBody>
           <a:bodyPr/>
@@ -4787,7 +4877,7 @@
             <a:spLocks noGrp="1"/>
           </p:cNvSpPr>
           <p:nvPr>
-            <p:ph idx="1" sz="half"/>
+            <p:ph idx="1"/>
           </p:nvPr>
         </p:nvSpPr>
         <p:spPr/>
@@ -5190,36 +5280,6 @@
           </a:p>
         </p:txBody>
       </p:sp>
-      <p:pic>
-        <p:nvPicPr>
-          <p:cNvPr descr="images/diagram_function.png" id="0" name="Picture 1"/>
-          <p:cNvPicPr>
-            <a:picLocks noGrp="1" noChangeAspect="1"/>
-          </p:cNvPicPr>
-          <p:nvPr/>
-        </p:nvPicPr>
-        <p:blipFill>
-          <a:blip r:embed="rId2"/>
-          <a:stretch>
-            <a:fillRect/>
-          </a:stretch>
-        </p:blipFill>
-        <p:spPr bwMode="auto">
-          <a:xfrm>
-            <a:off x="4495800" y="863600"/>
-            <a:ext cx="4406900" cy="3390900"/>
-          </a:xfrm>
-          <a:prstGeom prst="rect">
-            <a:avLst/>
-          </a:prstGeom>
-          <a:noFill/>
-          <a:ln w="9525">
-            <a:noFill/>
-            <a:headEnd/>
-            <a:tailEnd/>
-          </a:ln>
-        </p:spPr>
-      </p:pic>
     </p:spTree>
   </p:cSld>
 </p:sld>
@@ -6249,8 +6309,8 @@
         </p:blipFill>
         <p:spPr bwMode="auto">
           <a:xfrm>
-            <a:off x="4495800" y="787400"/>
-            <a:ext cx="4406900" cy="3556000"/>
+            <a:off x="4660900" y="660400"/>
+            <a:ext cx="4089400" cy="3302000"/>
           </a:xfrm>
           <a:prstGeom prst="rect">
             <a:avLst/>
@@ -6263,6 +6323,38 @@
           </a:ln>
         </p:spPr>
       </p:pic>
+      <p:sp>
+        <p:nvSpPr>
+          <p:cNvPr id="1" name="TextBox 3"/>
+          <p:cNvSpPr txBox="1"/>
+          <p:nvPr>
+            <p:ph idx="1"/>
+          </p:nvPr>
+        </p:nvSpPr>
+        <p:spPr>
+          <a:xfrm>
+            <a:off x="4495800" y="3962400"/>
+            <a:ext cx="4406900" cy="508000"/>
+          </a:xfrm>
+          <a:prstGeom prst="rect">
+            <a:avLst/>
+          </a:prstGeom>
+          <a:noFill/>
+        </p:spPr>
+        <p:txBody>
+          <a:bodyPr/>
+          <a:lstStyle/>
+          <a:p>
+            <a:pPr lvl="0" indent="0" marL="0" algn="ctr">
+              <a:buNone/>
+            </a:pPr>
+            <a:r>
+              <a:rPr/>
+              <a:t>Diagram of R data types: a vector mixing numbers and a string all coercing to character, and a coercion ladder from logical up through integer, numeric, to character.</a:t>
+            </a:r>
+          </a:p>
+        </p:txBody>
+      </p:sp>
     </p:spTree>
   </p:cSld>
 </p:sld>
@@ -6384,8 +6476,8 @@
               <a:buNone/>
             </a:pPr>
             <a:r>
-              <a:rPr/>
-              <a:t>The console forgets.</a:t>
+              <a:rPr b="1"/>
+              <a:t>The console forgets and you would have to retype all of your code over and over….</a:t>
             </a:r>
           </a:p>
           <a:p>
@@ -6412,7 +6504,7 @@
             </a:r>
             <a:r>
               <a:rPr/>
-              <a:t> file) remembers and re-runs.</a:t>
+              <a:t> file) remembers and re-runs code</a:t>
             </a:r>
           </a:p>
           <a:p>
@@ -6571,8 +6663,8 @@
         </p:blipFill>
         <p:spPr bwMode="auto">
           <a:xfrm>
-            <a:off x="4495800" y="838200"/>
-            <a:ext cx="4406900" cy="3441700"/>
+            <a:off x="4584700" y="660400"/>
+            <a:ext cx="4229100" cy="3302000"/>
           </a:xfrm>
           <a:prstGeom prst="rect">
             <a:avLst/>
@@ -6585,6 +6677,38 @@
           </a:ln>
         </p:spPr>
       </p:pic>
+      <p:sp>
+        <p:nvSpPr>
+          <p:cNvPr id="1" name="TextBox 3"/>
+          <p:cNvSpPr txBox="1"/>
+          <p:nvPr>
+            <p:ph idx="1"/>
+          </p:nvPr>
+        </p:nvSpPr>
+        <p:spPr>
+          <a:xfrm>
+            <a:off x="4495800" y="3962400"/>
+            <a:ext cx="4406900" cy="508000"/>
+          </a:xfrm>
+          <a:prstGeom prst="rect">
+            <a:avLst/>
+          </a:prstGeom>
+          <a:noFill/>
+        </p:spPr>
+        <p:txBody>
+          <a:bodyPr/>
+          <a:lstStyle/>
+          <a:p>
+            <a:pPr lvl="0" indent="0" marL="0" algn="ctr">
+              <a:buNone/>
+            </a:pPr>
+            <a:r>
+              <a:rPr/>
+              <a:t>Screenshot of the Positron editor pane with a script file open above the Terminal, and the Explorer, Variables, and Plots panes visible.</a:t>
+            </a:r>
+          </a:p>
+        </p:txBody>
+      </p:sp>
     </p:spTree>
   </p:cSld>
 </p:sld>
@@ -6761,6 +6885,43 @@
               </a:rPr>
               <a:t>)</a:t>
             </a:r>
+            <a:br/>
+            <a:r>
+              <a:rPr>
+                <a:solidFill>
+                  <a:srgbClr val="4758AB"/>
+                </a:solidFill>
+                <a:latin typeface="Courier"/>
+              </a:rPr>
+              <a:t>install.packages</a:t>
+            </a:r>
+            <a:r>
+              <a:rPr>
+                <a:solidFill>
+                  <a:srgbClr val="003B4F"/>
+                </a:solidFill>
+                <a:latin typeface="Courier"/>
+              </a:rPr>
+              <a:t>(</a:t>
+            </a:r>
+            <a:r>
+              <a:rPr>
+                <a:solidFill>
+                  <a:srgbClr val="20794D"/>
+                </a:solidFill>
+                <a:latin typeface="Courier"/>
+              </a:rPr>
+              <a:t>"janitor"</a:t>
+            </a:r>
+            <a:r>
+              <a:rPr>
+                <a:solidFill>
+                  <a:srgbClr val="003B4F"/>
+                </a:solidFill>
+                <a:latin typeface="Courier"/>
+              </a:rPr>
+              <a:t>)</a:t>
+            </a:r>
           </a:p>
           <a:p>
             <a:pPr lvl="0" indent="0" marL="0">
@@ -6833,6 +6994,34 @@
                 <a:latin typeface="Courier"/>
               </a:rPr>
               <a:t># read Excel files</a:t>
+            </a:r>
+            <a:br/>
+            <a:r>
+              <a:rPr>
+                <a:solidFill>
+                  <a:srgbClr val="4758AB"/>
+                </a:solidFill>
+                <a:latin typeface="Courier"/>
+              </a:rPr>
+              <a:t>library</a:t>
+            </a:r>
+            <a:r>
+              <a:rPr>
+                <a:solidFill>
+                  <a:srgbClr val="003B4F"/>
+                </a:solidFill>
+                <a:latin typeface="Courier"/>
+              </a:rPr>
+              <a:t>(janitor)      </a:t>
+            </a:r>
+            <a:r>
+              <a:rPr>
+                <a:solidFill>
+                  <a:srgbClr val="5E5E5E"/>
+                </a:solidFill>
+                <a:latin typeface="Courier"/>
+              </a:rPr>
+              <a:t># cleans up messy column names</a:t>
             </a:r>
           </a:p>
           <a:p>
@@ -6925,9 +7114,7 @@
             </a:r>
           </a:p>
           <a:p>
-            <a:pPr lvl="0" indent="0" marL="1270000">
-              <a:buNone/>
-            </a:pPr>
+            <a:pPr lvl="0"/>
             <a:r>
               <a:rPr sz="2000" b="1"/>
               <a:t>Package</a:t>
@@ -6938,9 +7125,7 @@
             </a:r>
           </a:p>
           <a:p>
-            <a:pPr lvl="0" indent="0" marL="1270000">
-              <a:buNone/>
-            </a:pPr>
+            <a:pPr lvl="0"/>
             <a:r>
               <a:rPr sz="2000" b="1"/>
               <a:t>Library</a:t>
@@ -7298,26 +7483,6 @@
               <a:t>(readxl)</a:t>
             </a:r>
             <a:br/>
-            <a:br/>
-            <a:r>
-              <a:rPr>
-                <a:solidFill>
-                  <a:srgbClr val="5E5E5E"/>
-                </a:solidFill>
-                <a:latin typeface="Courier"/>
-              </a:rPr>
-              <a:t># Excel files (.xlsx)</a:t>
-            </a:r>
-            <a:br/>
-            <a:r>
-              <a:rPr>
-                <a:solidFill>
-                  <a:srgbClr val="003B4F"/>
-                </a:solidFill>
-                <a:latin typeface="Courier"/>
-              </a:rPr>
-              <a:t>tree_df &lt;- </a:t>
-            </a:r>
             <a:r>
               <a:rPr>
                 <a:solidFill>
@@ -7325,34 +7490,16 @@
                 </a:solidFill>
                 <a:latin typeface="Courier"/>
               </a:rPr>
-              <a:t>read_excel</a:t>
-            </a:r>
-            <a:r>
-              <a:rPr>
-                <a:solidFill>
-                  <a:srgbClr val="003B4F"/>
-                </a:solidFill>
-                <a:latin typeface="Courier"/>
-              </a:rPr>
-              <a:t>(</a:t>
-            </a:r>
-            <a:r>
-              <a:rPr>
-                <a:solidFill>
-                  <a:srgbClr val="20794D"/>
-                </a:solidFill>
-                <a:latin typeface="Courier"/>
-              </a:rPr>
-              <a:t>"data/2026_06_25_tree_experiment_raw_data.xlsx"</a:t>
-            </a:r>
-            <a:r>
-              <a:rPr>
-                <a:solidFill>
-                  <a:srgbClr val="003B4F"/>
-                </a:solidFill>
-                <a:latin typeface="Courier"/>
-              </a:rPr>
-              <a:t>)</a:t>
+              <a:t>library</a:t>
+            </a:r>
+            <a:r>
+              <a:rPr>
+                <a:solidFill>
+                  <a:srgbClr val="003B4F"/>
+                </a:solidFill>
+                <a:latin typeface="Courier"/>
+              </a:rPr>
+              <a:t>(janitor)</a:t>
             </a:r>
             <a:br/>
             <a:br/>
@@ -7363,6 +7510,100 @@
                 </a:solidFill>
                 <a:latin typeface="Courier"/>
               </a:rPr>
+              <a:t># Excel files (.xlsx)</a:t>
+            </a:r>
+            <a:br/>
+            <a:r>
+              <a:rPr>
+                <a:solidFill>
+                  <a:srgbClr val="003B4F"/>
+                </a:solidFill>
+                <a:latin typeface="Courier"/>
+              </a:rPr>
+              <a:t>tree_df &lt;- </a:t>
+            </a:r>
+            <a:r>
+              <a:rPr>
+                <a:solidFill>
+                  <a:srgbClr val="4758AB"/>
+                </a:solidFill>
+                <a:latin typeface="Courier"/>
+              </a:rPr>
+              <a:t>read_excel</a:t>
+            </a:r>
+            <a:r>
+              <a:rPr>
+                <a:solidFill>
+                  <a:srgbClr val="003B4F"/>
+                </a:solidFill>
+                <a:latin typeface="Courier"/>
+              </a:rPr>
+              <a:t>(</a:t>
+            </a:r>
+            <a:r>
+              <a:rPr>
+                <a:solidFill>
+                  <a:srgbClr val="20794D"/>
+                </a:solidFill>
+                <a:latin typeface="Courier"/>
+              </a:rPr>
+              <a:t>"data/2026_06_25_tree_experiment_raw_data.xlsx"</a:t>
+            </a:r>
+            <a:r>
+              <a:rPr>
+                <a:solidFill>
+                  <a:srgbClr val="003B4F"/>
+                </a:solidFill>
+                <a:latin typeface="Courier"/>
+              </a:rPr>
+              <a:t>) </a:t>
+            </a:r>
+            <a:r>
+              <a:rPr>
+                <a:solidFill>
+                  <a:srgbClr val="5E5E5E"/>
+                </a:solidFill>
+                <a:latin typeface="Courier"/>
+              </a:rPr>
+              <a:t>%&gt;%</a:t>
+            </a:r>
+            <a:br/>
+            <a:r>
+              <a:rPr>
+                <a:solidFill>
+                  <a:srgbClr val="003B4F"/>
+                </a:solidFill>
+                <a:latin typeface="Courier"/>
+              </a:rPr>
+              <a:t>  </a:t>
+            </a:r>
+            <a:r>
+              <a:rPr>
+                <a:solidFill>
+                  <a:srgbClr val="4758AB"/>
+                </a:solidFill>
+                <a:latin typeface="Courier"/>
+              </a:rPr>
+              <a:t>clean_names</a:t>
+            </a:r>
+            <a:r>
+              <a:rPr>
+                <a:solidFill>
+                  <a:srgbClr val="003B4F"/>
+                </a:solidFill>
+                <a:latin typeface="Courier"/>
+              </a:rPr>
+              <a:t>()</a:t>
+            </a:r>
+            <a:br/>
+            <a:br/>
+            <a:r>
+              <a:rPr>
+                <a:solidFill>
+                  <a:srgbClr val="5E5E5E"/>
+                </a:solidFill>
+                <a:latin typeface="Courier"/>
+              </a:rPr>
               <a:t># CSV files (.csv) — used by NOAA, iNaturalist, many databases</a:t>
             </a:r>
             <a:br/>
@@ -7409,7 +7650,44 @@
                 </a:solidFill>
                 <a:latin typeface="Courier"/>
               </a:rPr>
-              <a:t>)</a:t>
+              <a:t>) </a:t>
+            </a:r>
+            <a:r>
+              <a:rPr>
+                <a:solidFill>
+                  <a:srgbClr val="5E5E5E"/>
+                </a:solidFill>
+                <a:latin typeface="Courier"/>
+              </a:rPr>
+              <a:t>%&gt;%</a:t>
+            </a:r>
+            <a:br/>
+            <a:r>
+              <a:rPr>
+                <a:solidFill>
+                  <a:srgbClr val="003B4F"/>
+                </a:solidFill>
+                <a:latin typeface="Courier"/>
+              </a:rPr>
+              <a:t>  </a:t>
+            </a:r>
+            <a:r>
+              <a:rPr>
+                <a:solidFill>
+                  <a:srgbClr val="4758AB"/>
+                </a:solidFill>
+                <a:latin typeface="Courier"/>
+              </a:rPr>
+              <a:t>clean_names</a:t>
+            </a:r>
+            <a:r>
+              <a:rPr>
+                <a:solidFill>
+                  <a:srgbClr val="003B4F"/>
+                </a:solidFill>
+                <a:latin typeface="Courier"/>
+              </a:rPr>
+              <a:t>()</a:t>
             </a:r>
           </a:p>
           <a:p>
@@ -7431,18 +7709,29 @@
             </a:r>
           </a:p>
           <a:p>
-            <a:pPr lvl="0" indent="0" marL="1270000">
-              <a:buNone/>
-            </a:pPr>
+            <a:pPr lvl="0"/>
             <a:r>
               <a:rPr sz="2000">
                 <a:latin typeface="Courier"/>
               </a:rPr>
+              <a:t>read.csv()</a:t>
+            </a:r>
+            <a:r>
+              <a:rPr sz="2000"/>
+              <a:t> - comes with base r and can have issues</a:t>
+            </a:r>
+          </a:p>
+          <a:p>
+            <a:pPr lvl="0"/>
+            <a:r>
+              <a:rPr sz="2000">
+                <a:latin typeface="Courier"/>
+              </a:rPr>
               <a:t>read_excel()</a:t>
             </a:r>
             <a:r>
               <a:rPr sz="2000"/>
-              <a:t> needs </a:t>
+              <a:t> - needs </a:t>
             </a:r>
             <a:r>
               <a:rPr sz="2000">
@@ -7452,8 +7741,11 @@
             </a:r>
             <a:r>
               <a:rPr sz="2000"/>
-              <a:t>. </a:t>
-            </a:r>
+              <a:t>.</a:t>
+            </a:r>
+          </a:p>
+          <a:p>
+            <a:pPr lvl="0"/>
             <a:r>
               <a:rPr sz="2000">
                 <a:latin typeface="Courier"/>
@@ -7462,7 +7754,7 @@
             </a:r>
             <a:r>
               <a:rPr sz="2000"/>
-              <a:t> comes with </a:t>
+              <a:t> - needs </a:t>
             </a:r>
             <a:r>
               <a:rPr sz="2000">
@@ -7470,9 +7762,48 @@
               </a:rPr>
               <a:t>library(tidyverse)</a:t>
             </a:r>
+          </a:p>
+          <a:p>
+            <a:pPr lvl="0"/>
+            <a:r>
+              <a:rPr sz="2000">
+                <a:latin typeface="Courier"/>
+              </a:rPr>
+              <a:t>clean_names()</a:t>
+            </a:r>
             <a:r>
               <a:rPr sz="2000"/>
-              <a:t> — no extra install needed.</a:t>
+              <a:t> - needs </a:t>
+            </a:r>
+            <a:r>
+              <a:rPr sz="2000">
+                <a:latin typeface="Courier"/>
+              </a:rPr>
+              <a:t>library(janitor)</a:t>
+            </a:r>
+            <a:r>
+              <a:rPr sz="2000"/>
+              <a:t>; turns messy Excel headers like </a:t>
+            </a:r>
+            <a:r>
+              <a:rPr sz="2000">
+                <a:latin typeface="Courier"/>
+              </a:rPr>
+              <a:t>"Leaf Weight (g)"</a:t>
+            </a:r>
+            <a:r>
+              <a:rPr sz="2000"/>
+              <a:t> into tidy names like </a:t>
+            </a:r>
+            <a:r>
+              <a:rPr sz="2000">
+                <a:latin typeface="Courier"/>
+              </a:rPr>
+              <a:t>leaf_weight_g</a:t>
+            </a:r>
+            <a:r>
+              <a:rPr sz="2000"/>
+              <a:t> automatically</a:t>
             </a:r>
           </a:p>
         </p:txBody>
@@ -7540,6 +7871,51 @@
             <a:r>
               <a:rPr sz="2000"/>
               <a:t> in R.</a:t>
+            </a:r>
+          </a:p>
+          <a:p>
+            <a:pPr lvl="0" indent="0" marL="1270000">
+              <a:buNone/>
+            </a:pPr>
+            <a:r>
+              <a:rPr sz="2000" b="1"/>
+              <a:t>Note</a:t>
+            </a:r>
+          </a:p>
+          <a:p>
+            <a:pPr lvl="0" indent="0" marL="1270000">
+              <a:buNone/>
+            </a:pPr>
+            <a:r>
+              <a:rPr sz="2000" b="1"/>
+              <a:t>📚 Reference</a:t>
+            </a:r>
+          </a:p>
+          <a:p>
+            <a:pPr lvl="0" indent="0" marL="1270000">
+              <a:buNone/>
+            </a:pPr>
+            <a:r>
+              <a:rPr sz="2000"/>
+              <a:t>R for Data Science (2e), Ch. 7 — </a:t>
+            </a:r>
+            <a:r>
+              <a:rPr sz="2000" i="1"/>
+              <a:t>Data import</a:t>
+            </a:r>
+            <a:r>
+              <a:rPr sz="2000"/>
+              <a:t>. Covers </a:t>
+            </a:r>
+            <a:r>
+              <a:rPr sz="2000">
+                <a:latin typeface="Courier"/>
+              </a:rPr>
+              <a:t>read_csv()</a:t>
+            </a:r>
+            <a:r>
+              <a:rPr sz="2000"/>
+              <a:t> in depth, including column types and messy real-world files.</a:t>
             </a:r>
           </a:p>
         </p:txBody>
@@ -7857,8 +8233,8 @@
         </p:blipFill>
         <p:spPr bwMode="auto">
           <a:xfrm>
-            <a:off x="4495800" y="787400"/>
-            <a:ext cx="4406900" cy="3556000"/>
+            <a:off x="4660900" y="660400"/>
+            <a:ext cx="4089400" cy="3302000"/>
           </a:xfrm>
           <a:prstGeom prst="rect">
             <a:avLst/>
@@ -7871,6 +8247,38 @@
           </a:ln>
         </p:spPr>
       </p:pic>
+      <p:sp>
+        <p:nvSpPr>
+          <p:cNvPr id="1" name="TextBox 3"/>
+          <p:cNvSpPr txBox="1"/>
+          <p:nvPr>
+            <p:ph idx="1"/>
+          </p:nvPr>
+        </p:nvSpPr>
+        <p:spPr>
+          <a:xfrm>
+            <a:off x="4495800" y="3962400"/>
+            <a:ext cx="4406900" cy="508000"/>
+          </a:xfrm>
+          <a:prstGeom prst="rect">
+            <a:avLst/>
+          </a:prstGeom>
+          <a:noFill/>
+        </p:spPr>
+        <p:txBody>
+          <a:bodyPr/>
+          <a:lstStyle/>
+          <a:p>
+            <a:pPr lvl="0" indent="0" marL="0" algn="ctr">
+              <a:buNone/>
+            </a:pPr>
+            <a:r>
+              <a:rPr/>
+              <a:t>Diagram of a data frame as columns of vectors: a side column (character), weight_g column (numeric), and height_cm column (numeric), with rows lining up across columns.</a:t>
+            </a:r>
+          </a:p>
+        </p:txBody>
+      </p:sp>
     </p:spTree>
   </p:cSld>
 </p:sld>
@@ -8738,8 +9146,8 @@
         </p:blipFill>
         <p:spPr bwMode="auto">
           <a:xfrm>
-            <a:off x="4495800" y="787400"/>
-            <a:ext cx="4406900" cy="3556000"/>
+            <a:off x="4660900" y="660400"/>
+            <a:ext cx="4089400" cy="3302000"/>
           </a:xfrm>
           <a:prstGeom prst="rect">
             <a:avLst/>
@@ -8752,6 +9160,105 @@
           </a:ln>
         </p:spPr>
       </p:pic>
+      <p:sp>
+        <p:nvSpPr>
+          <p:cNvPr id="1" name="TextBox 3"/>
+          <p:cNvSpPr txBox="1"/>
+          <p:nvPr>
+            <p:ph idx="1"/>
+          </p:nvPr>
+        </p:nvSpPr>
+        <p:spPr>
+          <a:xfrm>
+            <a:off x="4495800" y="3962400"/>
+            <a:ext cx="4406900" cy="508000"/>
+          </a:xfrm>
+          <a:prstGeom prst="rect">
+            <a:avLst/>
+          </a:prstGeom>
+          <a:noFill/>
+        </p:spPr>
+        <p:txBody>
+          <a:bodyPr/>
+          <a:lstStyle/>
+          <a:p>
+            <a:pPr lvl="0" indent="0" marL="0" algn="ctr">
+              <a:buNone/>
+            </a:pPr>
+            <a:r>
+              <a:rPr/>
+              <a:t>Diagram of the pipe operator: tree_df flows down into filter(side == “sunny”), then flows down into summary(), read as “take tree_df, then filter, then summarise.”</a:t>
+            </a:r>
+          </a:p>
+        </p:txBody>
+      </p:sp>
+      <p:sp>
+        <p:nvSpPr>
+          <p:cNvPr id="4" name="Content Placeholder 3"/>
+          <p:cNvSpPr>
+            <a:spLocks noGrp="1"/>
+          </p:cNvSpPr>
+          <p:nvPr>
+            <p:ph idx="2" sz="half"/>
+          </p:nvPr>
+        </p:nvSpPr>
+        <p:spPr/>
+        <p:txBody>
+          <a:bodyPr/>
+          <a:lstStyle/>
+          <a:p>
+            <a:pPr lvl="0" indent="0" marL="1270000">
+              <a:buNone/>
+            </a:pPr>
+            <a:r>
+              <a:rPr sz="2000" b="1"/>
+              <a:t>Note</a:t>
+            </a:r>
+          </a:p>
+          <a:p>
+            <a:pPr lvl="0" indent="0" marL="1270000">
+              <a:buNone/>
+            </a:pPr>
+            <a:r>
+              <a:rPr sz="2000" b="1"/>
+              <a:t>Two pipes — same idea:</a:t>
+            </a:r>
+          </a:p>
+          <a:p>
+            <a:pPr lvl="0"/>
+            <a:r>
+              <a:rPr sz="2000">
+                <a:latin typeface="Courier"/>
+              </a:rPr>
+              <a:t>%&gt;%</a:t>
+            </a:r>
+            <a:r>
+              <a:rPr sz="2000"/>
+              <a:t> — from tidyverse (we use this one)</a:t>
+            </a:r>
+          </a:p>
+          <a:p>
+            <a:pPr lvl="0"/>
+            <a:r>
+              <a:rPr sz="2000">
+                <a:latin typeface="Courier"/>
+              </a:rPr>
+              <a:t>|&gt;</a:t>
+            </a:r>
+            <a:r>
+              <a:rPr sz="2000"/>
+              <a:t> — built into R 4.1+ (the “native pipe”)</a:t>
+            </a:r>
+          </a:p>
+          <a:p>
+            <a:pPr lvl="0"/>
+            <a:r>
+              <a:rPr sz="2000"/>
+              <a:t>They behave identically for everything in this course but I prefer the %&gt;%</a:t>
+            </a:r>
+          </a:p>
+        </p:txBody>
+      </p:sp>
     </p:spTree>
   </p:cSld>
 </p:sld>
@@ -8861,7 +9368,7 @@
             <a:spLocks noGrp="1"/>
           </p:cNvSpPr>
           <p:nvPr>
-            <p:ph idx="1" sz="half"/>
+            <p:ph idx="1"/>
           </p:nvPr>
         </p:nvSpPr>
         <p:spPr/>
@@ -9197,41 +9704,74 @@
             <a:pPr lvl="0"/>
             <a:r>
               <a:rPr sz="2000"/>
-              <a:t>AND YES - Totally confusing to have %&gt;% for code and + for plots - but its the way it is….</a:t>
+              <a:t>AND YES — it’s confusing to use </a:t>
+            </a:r>
+            <a:r>
+              <a:rPr sz="2000">
+                <a:latin typeface="Courier"/>
+              </a:rPr>
+              <a:t>%&gt;%</a:t>
+            </a:r>
+            <a:r>
+              <a:rPr sz="2000"/>
+              <a:t> for code and </a:t>
+            </a:r>
+            <a:r>
+              <a:rPr sz="2000">
+                <a:latin typeface="Courier"/>
+              </a:rPr>
+              <a:t>+</a:t>
+            </a:r>
+            <a:r>
+              <a:rPr sz="2000"/>
+              <a:t> for plots, but that’s just how it is.</a:t>
+            </a:r>
+          </a:p>
+          <a:p>
+            <a:pPr lvl="0" indent="0" marL="1270000">
+              <a:buNone/>
+            </a:pPr>
+            <a:r>
+              <a:rPr sz="2000" b="1"/>
+              <a:t>Note</a:t>
+            </a:r>
+          </a:p>
+          <a:p>
+            <a:pPr lvl="0" indent="0" marL="1270000">
+              <a:buNone/>
+            </a:pPr>
+            <a:r>
+              <a:rPr sz="2000" b="1"/>
+              <a:t>📚 Reference</a:t>
+            </a:r>
+          </a:p>
+          <a:p>
+            <a:pPr lvl="0" indent="0" marL="1270000">
+              <a:buNone/>
+            </a:pPr>
+            <a:r>
+              <a:rPr sz="2000"/>
+              <a:t>R for Data Science (2e), Ch. 1 — </a:t>
+            </a:r>
+            <a:r>
+              <a:rPr sz="2000" i="1"/>
+              <a:t>Data Visualization</a:t>
+            </a:r>
+            <a:r>
+              <a:rPr sz="2000"/>
+              <a:t>, and Whitlock &amp; Schluter, Ch. 2 — </a:t>
+            </a:r>
+            <a:r>
+              <a:rPr sz="2000" i="1"/>
+              <a:t>Displaying Data</a:t>
+            </a:r>
+            <a:r>
+              <a:rPr sz="2000"/>
+              <a:t>, on why we choose one graph type over another for a given kind of data.</a:t>
             </a:r>
           </a:p>
         </p:txBody>
       </p:sp>
-      <p:pic>
-        <p:nvPicPr>
-          <p:cNvPr descr="images/diagram_ggplot_layers.png" id="0" name="Picture 1"/>
-          <p:cNvPicPr>
-            <a:picLocks noGrp="1" noChangeAspect="1"/>
-          </p:cNvPicPr>
-          <p:nvPr/>
-        </p:nvPicPr>
-        <p:blipFill>
-          <a:blip r:embed="rId2"/>
-          <a:stretch>
-            <a:fillRect/>
-          </a:stretch>
-        </p:blipFill>
-        <p:spPr bwMode="auto">
-          <a:xfrm>
-            <a:off x="4902200" y="660400"/>
-            <a:ext cx="3581400" cy="3810000"/>
-          </a:xfrm>
-          <a:prstGeom prst="rect">
-            <a:avLst/>
-          </a:prstGeom>
-          <a:noFill/>
-          <a:ln w="9525">
-            <a:noFill/>
-            <a:headEnd/>
-            <a:tailEnd/>
-          </a:ln>
-        </p:spPr>
-      </p:pic>
     </p:spTree>
   </p:cSld>
 </p:sld>
@@ -9612,6 +10152,206 @@
                 </a:solidFill>
                 <a:latin typeface="Courier"/>
               </a:rPr>
+              <a:t>geom_point</a:t>
+            </a:r>
+            <a:r>
+              <a:rPr>
+                <a:solidFill>
+                  <a:srgbClr val="003B4F"/>
+                </a:solidFill>
+                <a:latin typeface="Courier"/>
+              </a:rPr>
+              <a:t>(</a:t>
+            </a:r>
+            <a:r>
+              <a:rPr>
+                <a:solidFill>
+                  <a:srgbClr val="657422"/>
+                </a:solidFill>
+                <a:latin typeface="Courier"/>
+              </a:rPr>
+              <a:t>position =</a:t>
+            </a:r>
+            <a:r>
+              <a:rPr>
+                <a:solidFill>
+                  <a:srgbClr val="003B4F"/>
+                </a:solidFill>
+                <a:latin typeface="Courier"/>
+              </a:rPr>
+              <a:t> </a:t>
+            </a:r>
+            <a:r>
+              <a:rPr>
+                <a:solidFill>
+                  <a:srgbClr val="4758AB"/>
+                </a:solidFill>
+                <a:latin typeface="Courier"/>
+              </a:rPr>
+              <a:t>position_dodge</a:t>
+            </a:r>
+            <a:r>
+              <a:rPr>
+                <a:solidFill>
+                  <a:srgbClr val="003B4F"/>
+                </a:solidFill>
+                <a:latin typeface="Courier"/>
+              </a:rPr>
+              <a:t>(</a:t>
+            </a:r>
+            <a:r>
+              <a:rPr>
+                <a:solidFill>
+                  <a:srgbClr val="657422"/>
+                </a:solidFill>
+                <a:latin typeface="Courier"/>
+              </a:rPr>
+              <a:t>width =</a:t>
+            </a:r>
+            <a:r>
+              <a:rPr>
+                <a:solidFill>
+                  <a:srgbClr val="003B4F"/>
+                </a:solidFill>
+                <a:latin typeface="Courier"/>
+              </a:rPr>
+              <a:t> </a:t>
+            </a:r>
+            <a:r>
+              <a:rPr>
+                <a:solidFill>
+                  <a:srgbClr val="AD0000"/>
+                </a:solidFill>
+                <a:latin typeface="Courier"/>
+              </a:rPr>
+              <a:t>0.15</a:t>
+            </a:r>
+            <a:r>
+              <a:rPr>
+                <a:solidFill>
+                  <a:srgbClr val="003B4F"/>
+                </a:solidFill>
+                <a:latin typeface="Courier"/>
+              </a:rPr>
+              <a:t>, </a:t>
+            </a:r>
+            <a:r>
+              <a:rPr>
+                <a:solidFill>
+                  <a:srgbClr val="657422"/>
+                </a:solidFill>
+                <a:latin typeface="Courier"/>
+              </a:rPr>
+              <a:t>alpha =</a:t>
+            </a:r>
+            <a:r>
+              <a:rPr>
+                <a:solidFill>
+                  <a:srgbClr val="003B4F"/>
+                </a:solidFill>
+                <a:latin typeface="Courier"/>
+              </a:rPr>
+              <a:t> </a:t>
+            </a:r>
+            <a:r>
+              <a:rPr>
+                <a:solidFill>
+                  <a:srgbClr val="AD0000"/>
+                </a:solidFill>
+                <a:latin typeface="Courier"/>
+              </a:rPr>
+              <a:t>0.6</a:t>
+            </a:r>
+            <a:r>
+              <a:rPr>
+                <a:solidFill>
+                  <a:srgbClr val="003B4F"/>
+                </a:solidFill>
+                <a:latin typeface="Courier"/>
+              </a:rPr>
+              <a:t>, </a:t>
+            </a:r>
+            <a:r>
+              <a:rPr>
+                <a:solidFill>
+                  <a:srgbClr val="657422"/>
+                </a:solidFill>
+                <a:latin typeface="Courier"/>
+              </a:rPr>
+              <a:t>color =</a:t>
+            </a:r>
+            <a:r>
+              <a:rPr>
+                <a:solidFill>
+                  <a:srgbClr val="003B4F"/>
+                </a:solidFill>
+                <a:latin typeface="Courier"/>
+              </a:rPr>
+              <a:t> </a:t>
+            </a:r>
+            <a:r>
+              <a:rPr>
+                <a:solidFill>
+                  <a:srgbClr val="20794D"/>
+                </a:solidFill>
+                <a:latin typeface="Courier"/>
+              </a:rPr>
+              <a:t>"tomato"</a:t>
+            </a:r>
+            <a:r>
+              <a:rPr>
+                <a:solidFill>
+                  <a:srgbClr val="003B4F"/>
+                </a:solidFill>
+                <a:latin typeface="Courier"/>
+              </a:rPr>
+              <a:t>)) </a:t>
+            </a:r>
+            <a:r>
+              <a:rPr>
+                <a:solidFill>
+                  <a:srgbClr val="5E5E5E"/>
+                </a:solidFill>
+                <a:latin typeface="Courier"/>
+              </a:rPr>
+              <a:t>+</a:t>
+            </a:r>
+            <a:r>
+              <a:rPr>
+                <a:solidFill>
+                  <a:srgbClr val="003B4F"/>
+                </a:solidFill>
+                <a:latin typeface="Courier"/>
+              </a:rPr>
+              <a:t> </a:t>
+            </a:r>
+            <a:br/>
+            <a:r>
+              <a:rPr>
+                <a:solidFill>
+                  <a:srgbClr val="5E5E5E"/>
+                </a:solidFill>
+                <a:latin typeface="Courier"/>
+              </a:rPr>
+              <a:t># the two above are about the same but I prefer the lower one for a few reasons....</a:t>
+            </a:r>
+            <a:br/>
+            <a:r>
+              <a:rPr>
+                <a:solidFill>
+                  <a:srgbClr val="003B4F"/>
+                </a:solidFill>
+                <a:latin typeface="Courier"/>
+              </a:rPr>
+              <a:t>  </a:t>
+            </a:r>
+            <a:r>
+              <a:rPr>
+                <a:solidFill>
+                  <a:srgbClr val="4758AB"/>
+                </a:solidFill>
+                <a:latin typeface="Courier"/>
+              </a:rPr>
               <a:t>labs</a:t>
             </a:r>
             <a:r>
@@ -9841,7 +10581,11 @@
             </a:pPr>
             <a:r>
               <a:rPr b="1"/>
-              <a:t>CAN YOU DRAW A SKETCH OF WHAT THIS MIGHT LOOK LIKE???</a:t>
+              <a:t>Before you run it:</a:t>
+            </a:r>
+            <a:r>
+              <a:rPr/>
+              <a:t> sketch what you expect this plot to look like — boxes, dots, axes — then compare it to what R draws.</a:t>
             </a:r>
           </a:p>
         </p:txBody>
@@ -10442,6 +11186,19 @@
             <a:pPr lvl="0" indent="0" marL="1270000">
               <a:buNone/>
             </a:pPr>
+            <a:r>
+              <a:rPr sz="2000"/>
+              <a:t>Screenshot of the Save Plot dialog in Positron’s Plots pane, with the leaf weight boxplot ready to save as a PNG.</a:t>
+            </a:r>
+          </a:p>
+          <a:p>
+            <a:pPr lvl="0" indent="0" marL="1270000">
+              <a:buNone/>
+            </a:pPr>
+            <a:r>
+              <a:rPr sz="2000"/>
+              <a:t>Screenshot of the Save Plot dialog in Positron’s Plots pane, with the leaf weight boxplot ready to save as a PNG.</a:t>
+            </a:r>
           </a:p>
         </p:txBody>
       </p:sp>
@@ -10843,66 +11600,81 @@
             </a:pPr>
             <a:r>
               <a:rPr b="1"/>
-              <a:t>Up next — Lecture 03:</a:t>
+              <a:t>Up next — Lecture 03 &amp; 04 (Week 2):</a:t>
             </a:r>
           </a:p>
           <a:p>
             <a:pPr lvl="0"/>
             <a:r>
-              <a:rPr>
-                <a:latin typeface="Courier"/>
-              </a:rPr>
-              <a:t>filter()</a:t>
-            </a:r>
-            <a:r>
-              <a:rPr/>
-              <a:t> — pick rows</a:t>
+              <a:rPr/>
+              <a:t>Two lectures on </a:t>
+            </a:r>
+            <a:r>
+              <a:rPr>
+                <a:latin typeface="Courier"/>
+              </a:rPr>
+              <a:t>ggplot2</a:t>
+            </a:r>
+            <a:r>
+              <a:rPr/>
+              <a:t> in depth — </a:t>
+            </a:r>
+            <a:r>
+              <a:rPr>
+                <a:latin typeface="Courier"/>
+              </a:rPr>
+              <a:t>stat_summary()</a:t>
+            </a:r>
+            <a:r>
+              <a:rPr/>
+              <a:t>, </a:t>
+            </a:r>
+            <a:r>
+              <a:rPr>
+                <a:latin typeface="Courier"/>
+              </a:rPr>
+              <a:t>facet_wrap()</a:t>
+            </a:r>
+            <a:r>
+              <a:rPr/>
+              <a:t>/</a:t>
+            </a:r>
+            <a:r>
+              <a:rPr>
+                <a:latin typeface="Courier"/>
+              </a:rPr>
+              <a:t>facet_grid()</a:t>
+            </a:r>
+            <a:r>
+              <a:rPr/>
+              <a:t>, </a:t>
+            </a:r>
+            <a:r>
+              <a:rPr>
+                <a:latin typeface="Courier"/>
+              </a:rPr>
+              <a:t>scale_color_manual()</a:t>
+            </a:r>
+            <a:r>
+              <a:rPr/>
+              <a:t>, </a:t>
+            </a:r>
+            <a:r>
+              <a:rPr>
+                <a:latin typeface="Courier"/>
+              </a:rPr>
+              <a:t>coord_cartesian()</a:t>
+            </a:r>
+            <a:r>
+              <a:rPr/>
+              <a:t>, and themes</a:t>
             </a:r>
           </a:p>
           <a:p>
             <a:pPr lvl="0"/>
             <a:r>
-              <a:rPr>
-                <a:latin typeface="Courier"/>
-              </a:rPr>
-              <a:t>select()</a:t>
-            </a:r>
-            <a:r>
-              <a:rPr/>
-              <a:t> — pick columns</a:t>
-            </a:r>
-          </a:p>
-          <a:p>
-            <a:pPr lvl="0"/>
-            <a:r>
-              <a:rPr>
-                <a:latin typeface="Courier"/>
-              </a:rPr>
-              <a:t>mutate()</a:t>
-            </a:r>
-            <a:r>
-              <a:rPr/>
-              <a:t> — create new columns</a:t>
-            </a:r>
-          </a:p>
-          <a:p>
-            <a:pPr lvl="0"/>
-            <a:r>
-              <a:rPr>
-                <a:latin typeface="Courier"/>
-              </a:rPr>
-              <a:t>arrange()</a:t>
-            </a:r>
-            <a:r>
-              <a:rPr/>
-              <a:t> — sort rows</a:t>
-            </a:r>
-          </a:p>
-          <a:p>
-            <a:pPr lvl="0"/>
-            <a:r>
-              <a:rPr/>
-              <a:t>Then: descriptive statistics on our leaf data</a:t>
+              <a:rPr/>
+              <a:t>We will keep using our own leaf data the whole time</a:t>
             </a:r>
           </a:p>
         </p:txBody>
@@ -10942,11 +11714,8 @@
         <p:spPr>
           <a:xfrm>
             <a:off x="0" y="0"/>
-            <a:ext cx="9144000" cy="602780"/>
+            <a:ext cx="9144000" cy="582780"/>
           </a:xfrm>
-          <a:solidFill>
-            <a:srgbClr val="1A1A2E"/>
-          </a:solidFill>
         </p:spPr>
         <p:txBody>
           <a:bodyPr/>
@@ -10957,7 +11726,7 @@
             </a:pPr>
             <a:r>
               <a:rPr/>
-              <a:t>Getting unstuck</a:t>
+              <a:t>→ ACTIVITY 2 starts now</a:t>
             </a:r>
           </a:p>
         </p:txBody>
@@ -10969,7 +11738,7 @@
             <a:spLocks noGrp="1"/>
           </p:cNvSpPr>
           <p:nvPr>
-            <p:ph idx="1" sz="half"/>
+            <p:ph idx="1"/>
           </p:nvPr>
         </p:nvSpPr>
         <p:spPr/>
@@ -10981,196 +11750,25 @@
               <a:buNone/>
             </a:pPr>
             <a:r>
-              <a:rPr/>
-              <a:t>When code breaks (it will — that is normal):</a:t>
-            </a:r>
-          </a:p>
-          <a:p>
-            <a:pPr lvl="0"/>
-            <a:r>
-              <a:rPr>
-                <a:latin typeface="Courier"/>
-              </a:rPr>
-              <a:t>?function_name</a:t>
-            </a:r>
-            <a:r>
-              <a:rPr/>
-              <a:t> — the built-in help page</a:t>
-            </a:r>
-          </a:p>
-          <a:p>
-            <a:pPr lvl="0"/>
-            <a:r>
-              <a:rPr/>
-              <a:t>Read the </a:t>
-            </a:r>
-            <a:r>
               <a:rPr b="1"/>
-              <a:t>error message</a:t>
-            </a:r>
-            <a:r>
-              <a:rPr/>
-              <a:t> out loud; it usually names the line</a:t>
-            </a:r>
-          </a:p>
-          <a:p>
-            <a:pPr lvl="0"/>
-            <a:r>
-              <a:rPr/>
-              <a:t>Check: did you load </a:t>
-            </a:r>
-            <a:r>
-              <a:rPr>
-                <a:latin typeface="Courier"/>
-              </a:rPr>
-              <a:t>library(tidyverse)</a:t>
-            </a:r>
-            <a:r>
-              <a:rPr/>
-              <a:t> and </a:t>
-            </a:r>
-            <a:r>
-              <a:rPr>
-                <a:latin typeface="Courier"/>
-              </a:rPr>
-              <a:t>library(readxl)</a:t>
-            </a:r>
-            <a:r>
-              <a:rPr/>
-              <a:t>?</a:t>
-            </a:r>
-          </a:p>
-          <a:p>
-            <a:pPr lvl="0"/>
-            <a:r>
-              <a:rPr/>
-              <a:t>Check: spelling? A missing </a:t>
-            </a:r>
-            <a:r>
-              <a:rPr>
-                <a:latin typeface="Courier"/>
-              </a:rPr>
-              <a:t>)</a:t>
-            </a:r>
-            <a:r>
-              <a:rPr/>
-              <a:t> or </a:t>
-            </a:r>
-            <a:r>
-              <a:rPr>
-                <a:latin typeface="Courier"/>
-              </a:rPr>
-              <a:t>+</a:t>
-            </a:r>
-            <a:r>
-              <a:rPr/>
-              <a:t>?</a:t>
-            </a:r>
-          </a:p>
-          <a:p>
-            <a:pPr lvl="0"/>
-            <a:r>
-              <a:rPr/>
-              <a:t>The </a:t>
+              <a:t>🛑 Go to Activity 2 — “Introduction to R and Positron”</a:t>
+            </a:r>
+          </a:p>
+          <a:p>
+            <a:pPr lvl="0" indent="0" marL="0">
+              <a:buNone/>
+            </a:pPr>
+            <a:r>
+              <a:rPr/>
+              <a:t>Open the </a:t>
             </a:r>
             <a:r>
               <a:rPr b="1"/>
-              <a:t>posit/tidyverse cheatsheets</a:t>
-            </a:r>
-            <a:r>
-              <a:rPr/>
-              <a:t> are excellent: </a:t>
-            </a:r>
-            <a:r>
-              <a:rPr>
-                <a:hlinkClick r:id="rId2"/>
-              </a:rPr>
-              <a:t>posit.co/resources/cheatsheets</a:t>
-            </a:r>
-          </a:p>
-          <a:p>
-            <a:pPr lvl="0"/>
-            <a:r>
-              <a:rPr/>
-              <a:t>Bring the exact error (copy-paste it) to class or office hours</a:t>
-            </a:r>
-          </a:p>
-          <a:p>
-            <a:pPr lvl="0" indent="0" marL="1270000">
-              <a:buNone/>
-            </a:pPr>
-            <a:r>
-              <a:rPr sz="2000" b="1"/>
-              <a:t>Note</a:t>
-            </a:r>
-          </a:p>
-          <a:p>
-            <a:pPr lvl="0" indent="0" marL="1270000">
-              <a:buNone/>
-            </a:pPr>
-            <a:r>
-              <a:rPr sz="2000" b="1"/>
-              <a:t>✅ Key idea</a:t>
-            </a:r>
-          </a:p>
-          <a:p>
-            <a:pPr lvl="0" indent="0" marL="1270000">
-              <a:buNone/>
-            </a:pPr>
-            <a:r>
-              <a:rPr sz="2000"/>
-              <a:t>Every coder googles error messages daily. Getting stuck is not failing — it is the job.</a:t>
-            </a:r>
-          </a:p>
-        </p:txBody>
-      </p:sp>
-      <p:sp>
-        <p:nvSpPr>
-          <p:cNvPr id="4" name="Content Placeholder 3"/>
-          <p:cNvSpPr>
-            <a:spLocks noGrp="1"/>
-          </p:cNvSpPr>
-          <p:nvPr>
-            <p:ph idx="2" sz="half"/>
-          </p:nvPr>
-        </p:nvSpPr>
-        <p:spPr/>
-        <p:txBody>
-          <a:bodyPr/>
-          <a:lstStyle/>
-          <a:p>
-            <a:pPr lvl="0" indent="0" marL="1270000">
-              <a:buNone/>
-            </a:pPr>
-            <a:r>
-              <a:rPr sz="2000" b="1"/>
-              <a:t>Note</a:t>
-            </a:r>
-          </a:p>
-          <a:p>
-            <a:pPr lvl="0" indent="0" marL="1270000">
-              <a:buNone/>
-            </a:pPr>
-            <a:r>
-              <a:rPr sz="2000" b="1"/>
-              <a:t>📊 Coming from Excel?</a:t>
-            </a:r>
-          </a:p>
-          <a:p>
-            <a:pPr lvl="0" indent="0" marL="1270000">
-              <a:buNone/>
-            </a:pPr>
-            <a:r>
-              <a:rPr sz="2000"/>
-              <a:t>In Excel you fix errors by clicking around. In R you fix them by </a:t>
-            </a:r>
-            <a:r>
-              <a:rPr sz="2000" b="1"/>
-              <a:t>reading the message</a:t>
-            </a:r>
-            <a:r>
-              <a:rPr sz="2000"/>
-              <a:t> and editing one line. Slower at first, far more powerful soon.</a:t>
+              <a:t>Activity 2</a:t>
+            </a:r>
+            <a:r>
+              <a:rPr/>
+              <a:t> worksheet and work through it at your own pace, typing every code chunk into your own script in Positron. It repeats everything on these slides, in the same order, with blanks for you to fill in. Raise your hand if you get stuck — that is expected and normal.</a:t>
             </a:r>
           </a:p>
         </p:txBody>
@@ -11407,8 +12005,8 @@
         </p:blipFill>
         <p:spPr bwMode="auto">
           <a:xfrm>
-            <a:off x="4902200" y="660400"/>
-            <a:ext cx="3581400" cy="3810000"/>
+            <a:off x="5143500" y="660400"/>
+            <a:ext cx="3111500" cy="3302000"/>
           </a:xfrm>
           <a:prstGeom prst="rect">
             <a:avLst/>
@@ -11421,6 +12019,455 @@
           </a:ln>
         </p:spPr>
       </p:pic>
+      <p:sp>
+        <p:nvSpPr>
+          <p:cNvPr id="1" name="TextBox 3"/>
+          <p:cNvSpPr txBox="1"/>
+          <p:nvPr>
+            <p:ph idx="1"/>
+          </p:nvPr>
+        </p:nvSpPr>
+        <p:spPr>
+          <a:xfrm>
+            <a:off x="4495800" y="3962400"/>
+            <a:ext cx="4406900" cy="508000"/>
+          </a:xfrm>
+          <a:prstGeom prst="rect">
+            <a:avLst/>
+          </a:prstGeom>
+          <a:noFill/>
+        </p:spPr>
+        <p:txBody>
+          <a:bodyPr/>
+          <a:lstStyle/>
+          <a:p>
+            <a:pPr lvl="0" indent="0" marL="0" algn="ctr">
+              <a:buNone/>
+            </a:pPr>
+            <a:r>
+              <a:rPr/>
+              <a:t>Diagram showing ggplot’s layered construction: a data frame, then an aes() mapping, then a geom, stacked with + into a finished plot.</a:t>
+            </a:r>
+          </a:p>
+        </p:txBody>
+      </p:sp>
+    </p:spTree>
+  </p:cSld>
+</p:sld>
+</file>
+
+<file path=ppt/slides/slide30.xml><?xml version="1.0" encoding="utf-8"?>
+<p:sld xmlns:a="http://schemas.openxmlformats.org/drawingml/2006/main" xmlns:r="http://schemas.openxmlformats.org/officeDocument/2006/relationships" xmlns:p="http://schemas.openxmlformats.org/presentationml/2006/main">
+  <p:cSld>
+    <p:spTree>
+      <p:nvGrpSpPr>
+        <p:cNvPr id="1" name=""/>
+        <p:cNvGrpSpPr/>
+        <p:nvPr/>
+      </p:nvGrpSpPr>
+      <p:grpSpPr>
+        <a:xfrm>
+          <a:off x="0" y="0"/>
+          <a:ext cx="0" cy="0"/>
+          <a:chOff x="0" y="0"/>
+          <a:chExt cx="0" cy="0"/>
+        </a:xfrm>
+      </p:grpSpPr>
+      <p:sp>
+        <p:nvSpPr>
+          <p:cNvPr id="2" name="Title 1"/>
+          <p:cNvSpPr>
+            <a:spLocks noGrp="1"/>
+          </p:cNvSpPr>
+          <p:nvPr>
+            <p:ph type="title"/>
+          </p:nvPr>
+        </p:nvSpPr>
+        <p:spPr>
+          <a:xfrm>
+            <a:off x="0" y="0"/>
+            <a:ext cx="9144000" cy="582780"/>
+          </a:xfrm>
+        </p:spPr>
+        <p:txBody>
+          <a:bodyPr/>
+          <a:lstStyle/>
+          <a:p>
+            <a:pPr lvl="0" indent="0" marL="0">
+              <a:buNone/>
+            </a:pPr>
+            <a:r>
+              <a:rPr/>
+              <a:t>Suggested reading before Lecture 03</a:t>
+            </a:r>
+          </a:p>
+        </p:txBody>
+      </p:sp>
+      <p:sp>
+        <p:nvSpPr>
+          <p:cNvPr id="3" name="Content Placeholder 2"/>
+          <p:cNvSpPr>
+            <a:spLocks noGrp="1"/>
+          </p:cNvSpPr>
+          <p:nvPr>
+            <p:ph idx="1"/>
+          </p:nvPr>
+        </p:nvSpPr>
+        <p:spPr/>
+        <p:txBody>
+          <a:bodyPr/>
+          <a:lstStyle/>
+          <a:p>
+            <a:pPr lvl="0"/>
+            <a:r>
+              <a:rPr b="1"/>
+              <a:t>R for Data Science (2e)</a:t>
+            </a:r>
+            <a:r>
+              <a:rPr/>
+              <a:t>, Ch. 1 — </a:t>
+            </a:r>
+            <a:r>
+              <a:rPr i="1"/>
+              <a:t>Data Visualization</a:t>
+            </a:r>
+            <a:r>
+              <a:rPr/>
+              <a:t> (read fully this time — you skimmed it before Lecture 02)</a:t>
+            </a:r>
+          </a:p>
+          <a:p>
+            <a:pPr lvl="0"/>
+            <a:r>
+              <a:rPr b="1"/>
+              <a:t>R for Data Science (2e)</a:t>
+            </a:r>
+            <a:r>
+              <a:rPr/>
+              <a:t>, Ch. 6 — </a:t>
+            </a:r>
+            <a:r>
+              <a:rPr i="1"/>
+              <a:t>Workflow: scripts and projects</a:t>
+            </a:r>
+            <a:r>
+              <a:rPr/>
+              <a:t>, if you have not read it yet</a:t>
+            </a:r>
+          </a:p>
+          <a:p>
+            <a:pPr lvl="0"/>
+            <a:r>
+              <a:rPr b="1"/>
+              <a:t>Whitlock &amp; Schluter</a:t>
+            </a:r>
+            <a:r>
+              <a:rPr/>
+              <a:t>, Ch. 2 — </a:t>
+            </a:r>
+            <a:r>
+              <a:rPr i="1"/>
+              <a:t>Displaying Data</a:t>
+            </a:r>
+          </a:p>
+          <a:p>
+            <a:pPr lvl="0" indent="0" marL="1270000">
+              <a:buNone/>
+            </a:pPr>
+            <a:r>
+              <a:rPr sz="2000" b="1"/>
+              <a:t>Note</a:t>
+            </a:r>
+          </a:p>
+          <a:p>
+            <a:pPr lvl="0" indent="0" marL="1270000">
+              <a:buNone/>
+            </a:pPr>
+            <a:r>
+              <a:rPr sz="2000"/>
+              <a:t>Both books are in the course </a:t>
+            </a:r>
+            <a:r>
+              <a:rPr sz="2000">
+                <a:latin typeface="Courier"/>
+              </a:rPr>
+              <a:t>readings/</a:t>
+            </a:r>
+            <a:r>
+              <a:rPr sz="2000"/>
+              <a:t> folder.</a:t>
+            </a:r>
+          </a:p>
+        </p:txBody>
+      </p:sp>
+    </p:spTree>
+  </p:cSld>
+</p:sld>
+</file>
+
+<file path=ppt/slides/slide31.xml><?xml version="1.0" encoding="utf-8"?>
+<p:sld xmlns:a="http://schemas.openxmlformats.org/drawingml/2006/main" xmlns:r="http://schemas.openxmlformats.org/officeDocument/2006/relationships" xmlns:p="http://schemas.openxmlformats.org/presentationml/2006/main">
+  <p:cSld>
+    <p:spTree>
+      <p:nvGrpSpPr>
+        <p:cNvPr id="1" name=""/>
+        <p:cNvGrpSpPr/>
+        <p:nvPr/>
+      </p:nvGrpSpPr>
+      <p:grpSpPr>
+        <a:xfrm>
+          <a:off x="0" y="0"/>
+          <a:ext cx="0" cy="0"/>
+          <a:chOff x="0" y="0"/>
+          <a:chExt cx="0" cy="0"/>
+        </a:xfrm>
+      </p:grpSpPr>
+      <p:sp>
+        <p:nvSpPr>
+          <p:cNvPr id="2" name="Title 1"/>
+          <p:cNvSpPr>
+            <a:spLocks noGrp="1"/>
+          </p:cNvSpPr>
+          <p:nvPr>
+            <p:ph type="title"/>
+          </p:nvPr>
+        </p:nvSpPr>
+        <p:spPr>
+          <a:xfrm>
+            <a:off x="0" y="0"/>
+            <a:ext cx="9144000" cy="602780"/>
+          </a:xfrm>
+          <a:solidFill>
+            <a:srgbClr val="1A1A2E"/>
+          </a:solidFill>
+        </p:spPr>
+        <p:txBody>
+          <a:bodyPr/>
+          <a:lstStyle/>
+          <a:p>
+            <a:pPr lvl="0" indent="0" marL="0">
+              <a:buNone/>
+            </a:pPr>
+            <a:r>
+              <a:rPr/>
+              <a:t>Getting unstuck</a:t>
+            </a:r>
+          </a:p>
+        </p:txBody>
+      </p:sp>
+      <p:sp>
+        <p:nvSpPr>
+          <p:cNvPr id="3" name="Content Placeholder 2"/>
+          <p:cNvSpPr>
+            <a:spLocks noGrp="1"/>
+          </p:cNvSpPr>
+          <p:nvPr>
+            <p:ph idx="1" sz="half"/>
+          </p:nvPr>
+        </p:nvSpPr>
+        <p:spPr/>
+        <p:txBody>
+          <a:bodyPr/>
+          <a:lstStyle/>
+          <a:p>
+            <a:pPr lvl="0" indent="0" marL="0">
+              <a:buNone/>
+            </a:pPr>
+            <a:r>
+              <a:rPr/>
+              <a:t>When code breaks (it will — that is normal):</a:t>
+            </a:r>
+          </a:p>
+          <a:p>
+            <a:pPr lvl="0"/>
+            <a:r>
+              <a:rPr>
+                <a:latin typeface="Courier"/>
+              </a:rPr>
+              <a:t>?function_name</a:t>
+            </a:r>
+            <a:r>
+              <a:rPr/>
+              <a:t> — the built-in help page</a:t>
+            </a:r>
+          </a:p>
+          <a:p>
+            <a:pPr lvl="0"/>
+            <a:r>
+              <a:rPr/>
+              <a:t>Read the </a:t>
+            </a:r>
+            <a:r>
+              <a:rPr b="1"/>
+              <a:t>error message</a:t>
+            </a:r>
+            <a:r>
+              <a:rPr/>
+              <a:t> out loud; it usually names the line</a:t>
+            </a:r>
+          </a:p>
+          <a:p>
+            <a:pPr lvl="0"/>
+            <a:r>
+              <a:rPr/>
+              <a:t>Check: did you load </a:t>
+            </a:r>
+            <a:r>
+              <a:rPr>
+                <a:latin typeface="Courier"/>
+              </a:rPr>
+              <a:t>library(tidyverse)</a:t>
+            </a:r>
+            <a:r>
+              <a:rPr/>
+              <a:t> and </a:t>
+            </a:r>
+            <a:r>
+              <a:rPr>
+                <a:latin typeface="Courier"/>
+              </a:rPr>
+              <a:t>library(readxl)</a:t>
+            </a:r>
+            <a:r>
+              <a:rPr/>
+              <a:t>?</a:t>
+            </a:r>
+          </a:p>
+          <a:p>
+            <a:pPr lvl="0"/>
+            <a:r>
+              <a:rPr/>
+              <a:t>Check: spelling? A missing </a:t>
+            </a:r>
+            <a:r>
+              <a:rPr>
+                <a:latin typeface="Courier"/>
+              </a:rPr>
+              <a:t>)</a:t>
+            </a:r>
+            <a:r>
+              <a:rPr/>
+              <a:t> or </a:t>
+            </a:r>
+            <a:r>
+              <a:rPr>
+                <a:latin typeface="Courier"/>
+              </a:rPr>
+              <a:t>+</a:t>
+            </a:r>
+            <a:r>
+              <a:rPr/>
+              <a:t>?</a:t>
+            </a:r>
+          </a:p>
+          <a:p>
+            <a:pPr lvl="0"/>
+            <a:r>
+              <a:rPr/>
+              <a:t>The </a:t>
+            </a:r>
+            <a:r>
+              <a:rPr b="1"/>
+              <a:t>posit/tidyverse cheatsheets</a:t>
+            </a:r>
+            <a:r>
+              <a:rPr/>
+              <a:t> are excellent: </a:t>
+            </a:r>
+            <a:r>
+              <a:rPr>
+                <a:hlinkClick r:id="rId2"/>
+              </a:rPr>
+              <a:t>posit.co/resources/cheatsheets</a:t>
+            </a:r>
+          </a:p>
+          <a:p>
+            <a:pPr lvl="0"/>
+            <a:r>
+              <a:rPr/>
+              <a:t>Bring the exact error (copy-paste it) to class or office hours</a:t>
+            </a:r>
+          </a:p>
+          <a:p>
+            <a:pPr lvl="0" indent="0" marL="1270000">
+              <a:buNone/>
+            </a:pPr>
+            <a:r>
+              <a:rPr sz="2000" b="1"/>
+              <a:t>Note</a:t>
+            </a:r>
+          </a:p>
+          <a:p>
+            <a:pPr lvl="0" indent="0" marL="1270000">
+              <a:buNone/>
+            </a:pPr>
+            <a:r>
+              <a:rPr sz="2000" b="1"/>
+              <a:t>✅ Key idea</a:t>
+            </a:r>
+          </a:p>
+          <a:p>
+            <a:pPr lvl="0" indent="0" marL="1270000">
+              <a:buNone/>
+            </a:pPr>
+            <a:r>
+              <a:rPr sz="2000"/>
+              <a:t>Every coder googles error messages daily. Getting stuck is not failing — it is the job. Your job is to learn, and learning means breaking things and figuring out why.</a:t>
+            </a:r>
+          </a:p>
+        </p:txBody>
+      </p:sp>
+      <p:sp>
+        <p:nvSpPr>
+          <p:cNvPr id="4" name="Content Placeholder 3"/>
+          <p:cNvSpPr>
+            <a:spLocks noGrp="1"/>
+          </p:cNvSpPr>
+          <p:nvPr>
+            <p:ph idx="2" sz="half"/>
+          </p:nvPr>
+        </p:nvSpPr>
+        <p:spPr/>
+        <p:txBody>
+          <a:bodyPr/>
+          <a:lstStyle/>
+          <a:p>
+            <a:pPr lvl="0" indent="0" marL="1270000">
+              <a:buNone/>
+            </a:pPr>
+            <a:r>
+              <a:rPr sz="2000" b="1"/>
+              <a:t>Note</a:t>
+            </a:r>
+          </a:p>
+          <a:p>
+            <a:pPr lvl="0" indent="0" marL="1270000">
+              <a:buNone/>
+            </a:pPr>
+            <a:r>
+              <a:rPr sz="2000" b="1"/>
+              <a:t>📊 Coming from Excel?</a:t>
+            </a:r>
+          </a:p>
+          <a:p>
+            <a:pPr lvl="0" indent="0" marL="1270000">
+              <a:buNone/>
+            </a:pPr>
+            <a:r>
+              <a:rPr sz="2000"/>
+              <a:t>In Excel you fix errors by clicking around. In R you fix them by </a:t>
+            </a:r>
+            <a:r>
+              <a:rPr sz="2000" b="1"/>
+              <a:t>reading the message</a:t>
+            </a:r>
+            <a:r>
+              <a:rPr sz="2000"/>
+              <a:t> and editing one line. Slower at first, far more powerful soon.</a:t>
+            </a:r>
+          </a:p>
+        </p:txBody>
+      </p:sp>
     </p:spTree>
   </p:cSld>
 </p:sld>
@@ -11653,8 +12700,8 @@
         </p:blipFill>
         <p:spPr bwMode="auto">
           <a:xfrm>
-            <a:off x="4699000" y="660400"/>
-            <a:ext cx="3987800" cy="3810000"/>
+            <a:off x="4965700" y="660400"/>
+            <a:ext cx="3454400" cy="3302000"/>
           </a:xfrm>
           <a:prstGeom prst="rect">
             <a:avLst/>
@@ -11667,6 +12714,38 @@
           </a:ln>
         </p:spPr>
       </p:pic>
+      <p:sp>
+        <p:nvSpPr>
+          <p:cNvPr id="1" name="TextBox 3"/>
+          <p:cNvSpPr txBox="1"/>
+          <p:nvPr>
+            <p:ph idx="1"/>
+          </p:nvPr>
+        </p:nvSpPr>
+        <p:spPr>
+          <a:xfrm>
+            <a:off x="4495800" y="3962400"/>
+            <a:ext cx="4406900" cy="508000"/>
+          </a:xfrm>
+          <a:prstGeom prst="rect">
+            <a:avLst/>
+          </a:prstGeom>
+          <a:noFill/>
+        </p:spPr>
+        <p:txBody>
+          <a:bodyPr/>
+          <a:lstStyle/>
+          <a:p>
+            <a:pPr lvl="0" indent="0" marL="0" algn="ctr">
+              <a:buNone/>
+            </a:pPr>
+            <a:r>
+              <a:rPr/>
+              <a:t>Screenshot of the Positron IDE welcome screen, showing its Console/Terminal, Variables, and Plots panes.</a:t>
+            </a:r>
+          </a:p>
+        </p:txBody>
+      </p:sp>
     </p:spTree>
   </p:cSld>
 </p:sld>
@@ -11840,6 +12919,41 @@
             <a:r>
               <a:rPr sz="2000"/>
               <a:t>A tidy folder today saves an hour of “where did I put that file?” next week.</a:t>
+            </a:r>
+          </a:p>
+          <a:p>
+            <a:pPr lvl="0" indent="0" marL="1270000">
+              <a:buNone/>
+            </a:pPr>
+            <a:r>
+              <a:rPr sz="2000" b="1"/>
+              <a:t>Note</a:t>
+            </a:r>
+          </a:p>
+          <a:p>
+            <a:pPr lvl="0" indent="0" marL="1270000">
+              <a:buNone/>
+            </a:pPr>
+            <a:r>
+              <a:rPr sz="2000" b="1"/>
+              <a:t>📚 Reference</a:t>
+            </a:r>
+          </a:p>
+          <a:p>
+            <a:pPr lvl="0" indent="0" marL="1270000">
+              <a:buNone/>
+            </a:pPr>
+            <a:r>
+              <a:rPr sz="2000"/>
+              <a:t>R for Data Science (2e), Ch. 6 — </a:t>
+            </a:r>
+            <a:r>
+              <a:rPr sz="2000" i="1"/>
+              <a:t>Workflow: scripts and projects</a:t>
+            </a:r>
+            <a:r>
+              <a:rPr sz="2000"/>
+              <a:t>. Covers exactly this: projects, relative paths, and “what is the source of truth.”</a:t>
             </a:r>
           </a:p>
         </p:txBody>
@@ -12114,8 +13228,8 @@
         </p:blipFill>
         <p:spPr bwMode="auto">
           <a:xfrm>
-            <a:off x="4699000" y="660400"/>
-            <a:ext cx="3987800" cy="3810000"/>
+            <a:off x="4965700" y="660400"/>
+            <a:ext cx="3454400" cy="3302000"/>
           </a:xfrm>
           <a:prstGeom prst="rect">
             <a:avLst/>
@@ -12128,6 +13242,38 @@
           </a:ln>
         </p:spPr>
       </p:pic>
+      <p:sp>
+        <p:nvSpPr>
+          <p:cNvPr id="1" name="TextBox 3"/>
+          <p:cNvSpPr txBox="1"/>
+          <p:nvPr>
+            <p:ph idx="1"/>
+          </p:nvPr>
+        </p:nvSpPr>
+        <p:spPr>
+          <a:xfrm>
+            <a:off x="4495800" y="3962400"/>
+            <a:ext cx="4406900" cy="508000"/>
+          </a:xfrm>
+          <a:prstGeom prst="rect">
+            <a:avLst/>
+          </a:prstGeom>
+          <a:noFill/>
+        </p:spPr>
+        <p:txBody>
+          <a:bodyPr/>
+          <a:lstStyle/>
+          <a:p>
+            <a:pPr lvl="0" indent="0" marL="0" algn="ctr">
+              <a:buNone/>
+            </a:pPr>
+            <a:r>
+              <a:rPr/>
+              <a:t>Screenshot of the Positron IDE with its Editor, Console/Terminal, Variables, and Plots panes visible.</a:t>
+            </a:r>
+          </a:p>
+        </p:txBody>
+      </p:sp>
     </p:spTree>
   </p:cSld>
 </p:sld>
@@ -12431,9 +13577,7 @@
             </a:r>
           </a:p>
           <a:p>
-            <a:pPr lvl="0" indent="0" marL="1270000">
-              <a:buNone/>
-            </a:pPr>
+            <a:pPr lvl="0"/>
             <a:r>
               <a:rPr sz="2000"/>
               <a:t>A </a:t>
@@ -12454,7 +13598,14 @@
             </a:r>
             <a:r>
               <a:rPr sz="2000"/>
-              <a:t> for you to finish a command. Press Esc to start over.</a:t>
+              <a:t> for you to finish a command.</a:t>
+            </a:r>
+          </a:p>
+          <a:p>
+            <a:pPr lvl="0"/>
+            <a:r>
+              <a:rPr sz="2000"/>
+              <a:t>Press Esc to start over.</a:t>
             </a:r>
           </a:p>
         </p:txBody>
@@ -12492,9 +13643,7 @@
             </a:r>
           </a:p>
           <a:p>
-            <a:pPr lvl="0" indent="0" marL="1270000">
-              <a:buNone/>
-            </a:pPr>
+            <a:pPr lvl="0"/>
             <a:r>
               <a:rPr sz="2000"/>
               <a:t>This is just like typing </a:t>
@@ -12507,7 +13656,14 @@
             </a:r>
             <a:r>
               <a:rPr sz="2000"/>
-              <a:t> into an Excel cell — except there are no cells, just a line you type and run.</a:t>
+              <a:t> into an Excel cell</a:t>
+            </a:r>
+          </a:p>
+          <a:p>
+            <a:pPr lvl="0"/>
+            <a:r>
+              <a:rPr sz="2000"/>
+              <a:t>except there are no cells, just a line you type and run</a:t>
             </a:r>
           </a:p>
         </p:txBody>

--- a/docs/content/meeting_r/meeting_r_lecture.pptx
+++ b/docs/content/meeting_r/meeting_r_lecture.pptx
@@ -3370,7 +3370,7 @@
             </a:pPr>
             <a:r>
               <a:rPr/>
-              <a:t>2026-08-27</a:t>
+              <a:t>2026-09-01</a:t>
             </a:r>
           </a:p>
         </p:txBody>

--- a/docs/content/meeting_r/meeting_r_lecture.pptx
+++ b/docs/content/meeting_r/meeting_r_lecture.pptx
@@ -3370,7 +3370,7 @@
             </a:pPr>
             <a:r>
               <a:rPr/>
-              <a:t>2026-09-01</a:t>
+              <a:t>2026-09-03</a:t>
             </a:r>
           </a:p>
         </p:txBody>

--- a/docs/content/meeting_r/meeting_r_lecture.pptx
+++ b/docs/content/meeting_r/meeting_r_lecture.pptx
@@ -3370,7 +3370,7 @@
             </a:pPr>
             <a:r>
               <a:rPr/>
-              <a:t>2026-09-03</a:t>
+              <a:t>2026-09-04</a:t>
             </a:r>
           </a:p>
         </p:txBody>
@@ -3903,7 +3903,7 @@
               <a:rPr>
                 <a:latin typeface="Courier"/>
               </a:rPr>
-              <a:t>weight_g</a:t>
+              <a:t>mass_g</a:t>
             </a:r>
             <a:r>
               <a:rPr/>
@@ -3913,7 +3913,7 @@
               <a:rPr>
                 <a:latin typeface="Courier"/>
               </a:rPr>
-              <a:t>Weight_g</a:t>
+              <a:t>Mass_g</a:t>
             </a:r>
           </a:p>
           <a:p>
@@ -4290,7 +4290,7 @@
               <a:rPr sz="2000">
                 <a:latin typeface="Courier"/>
               </a:rPr>
-              <a:t>weight_g</a:t>
+              <a:t>mass_g</a:t>
             </a:r>
             <a:r>
               <a:rPr sz="2000"/>
@@ -4300,7 +4300,7 @@
               <a:rPr sz="2000">
                 <a:latin typeface="Courier"/>
               </a:rPr>
-              <a:t>weight_G</a:t>
+              <a:t>mass_G</a:t>
             </a:r>
             <a:r>
               <a:rPr sz="2000"/>
@@ -5387,7 +5387,7 @@
                 </a:solidFill>
                 <a:latin typeface="Courier"/>
               </a:rPr>
-              <a:t>weight_g &lt;- </a:t>
+              <a:t>mass_g &lt;- </a:t>
             </a:r>
             <a:r>
               <a:rPr>
@@ -5496,7 +5496,7 @@
                 </a:solidFill>
                 <a:latin typeface="Courier"/>
               </a:rPr>
-              <a:t>side     &lt;- </a:t>
+              <a:t>shade     &lt;- </a:t>
             </a:r>
             <a:r>
               <a:rPr>
@@ -5591,7 +5591,7 @@
                 </a:solidFill>
                 <a:latin typeface="Courier"/>
               </a:rPr>
-              <a:t>(weight_g)   </a:t>
+              <a:t>(mass_g)   </a:t>
             </a:r>
             <a:r>
               <a:rPr>
@@ -5619,7 +5619,7 @@
                 </a:solidFill>
                 <a:latin typeface="Courier"/>
               </a:rPr>
-              <a:t>(weight_g)    </a:t>
+              <a:t>(mass_g)    </a:t>
             </a:r>
             <a:r>
               <a:rPr>
@@ -5647,7 +5647,7 @@
                 </a:solidFill>
                 <a:latin typeface="Courier"/>
               </a:rPr>
-              <a:t>(weight_g)      </a:t>
+              <a:t>(mass_g)      </a:t>
             </a:r>
             <a:r>
               <a:rPr>
@@ -7332,7 +7332,7 @@
             </a:r>
             <a:r>
               <a:rPr/>
-              <a:t> — dependent (leaf mass/size) vs. independent (side of tree)</a:t>
+              <a:t> — dependent (leaf mass/size) vs. independent (shade of tree)</a:t>
             </a:r>
           </a:p>
           <a:p>
@@ -7547,7 +7547,7 @@
                 </a:solidFill>
                 <a:latin typeface="Courier"/>
               </a:rPr>
-              <a:t>"data/2026_06_25_tree_experiment_raw_data.xlsx"</a:t>
+              <a:t>"data/2026_09_03_data_sci_leaf_area.xlsx"</a:t>
             </a:r>
             <a:r>
               <a:rPr>
@@ -7789,7 +7789,7 @@
               <a:rPr sz="2000">
                 <a:latin typeface="Courier"/>
               </a:rPr>
-              <a:t>"Leaf Weight (g)"</a:t>
+              <a:t>"Leaf Mass (g)"</a:t>
             </a:r>
             <a:r>
               <a:rPr sz="2000"/>
@@ -7799,7 +7799,7 @@
               <a:rPr sz="2000">
                 <a:latin typeface="Courier"/>
               </a:rPr>
-              <a:t>leaf_weight_g</a:t>
+              <a:t>leaf_mass_g</a:t>
             </a:r>
             <a:r>
               <a:rPr sz="2000"/>
@@ -8030,7 +8030,7 @@
             </a:r>
             <a:r>
               <a:rPr/>
-              <a:t> has five columns:</a:t>
+              <a:t> has eight columns:</a:t>
             </a:r>
           </a:p>
           <a:p>
@@ -8039,11 +8039,115 @@
               <a:rPr>
                 <a:latin typeface="Courier"/>
               </a:rPr>
-              <a:t>index</a:t>
-            </a:r>
-            <a:r>
-              <a:rPr/>
-              <a:t> — leaf number </a:t>
+              <a:t>twig_id</a:t>
+            </a:r>
+            <a:r>
+              <a:rPr/>
+              <a:t>, </a:t>
+            </a:r>
+            <a:r>
+              <a:rPr>
+                <a:latin typeface="Courier"/>
+              </a:rPr>
+              <a:t>leaf_id</a:t>
+            </a:r>
+            <a:r>
+              <a:rPr/>
+              <a:t>, </a:t>
+            </a:r>
+            <a:r>
+              <a:rPr>
+                <a:latin typeface="Courier"/>
+              </a:rPr>
+              <a:t>teams</a:t>
+            </a:r>
+            <a:r>
+              <a:rPr/>
+              <a:t> — sample identifiers </a:t>
+            </a:r>
+            <a:r>
+              <a:rPr i="1"/>
+              <a:t>(character)</a:t>
+            </a:r>
+          </a:p>
+          <a:p>
+            <a:pPr lvl="0"/>
+            <a:r>
+              <a:rPr>
+                <a:latin typeface="Courier"/>
+              </a:rPr>
+              <a:t>shade</a:t>
+            </a:r>
+            <a:r>
+              <a:rPr/>
+              <a:t> — </a:t>
+            </a:r>
+            <a:r>
+              <a:rPr>
+                <a:latin typeface="Courier"/>
+              </a:rPr>
+              <a:t>"sunny"</a:t>
+            </a:r>
+            <a:r>
+              <a:rPr/>
+              <a:t> / </a:t>
+            </a:r>
+            <a:r>
+              <a:rPr>
+                <a:latin typeface="Courier"/>
+              </a:rPr>
+              <a:t>"shady"</a:t>
+            </a:r>
+            <a:r>
+              <a:rPr/>
+              <a:t> </a:t>
+            </a:r>
+            <a:r>
+              <a:rPr i="1"/>
+              <a:t>(character)</a:t>
+            </a:r>
+          </a:p>
+          <a:p>
+            <a:pPr lvl="0"/>
+            <a:r>
+              <a:rPr>
+                <a:latin typeface="Courier"/>
+              </a:rPr>
+              <a:t>mass_g</a:t>
+            </a:r>
+            <a:r>
+              <a:rPr/>
+              <a:t>, </a:t>
+            </a:r>
+            <a:r>
+              <a:rPr>
+                <a:latin typeface="Courier"/>
+              </a:rPr>
+              <a:t>petiole_mm</a:t>
+            </a:r>
+            <a:r>
+              <a:rPr/>
+              <a:t>, </a:t>
+            </a:r>
+            <a:r>
+              <a:rPr>
+                <a:latin typeface="Courier"/>
+              </a:rPr>
+              <a:t>thickness_mm</a:t>
+            </a:r>
+            <a:r>
+              <a:rPr/>
+              <a:t>, </a:t>
+            </a:r>
+            <a:r>
+              <a:rPr>
+                <a:latin typeface="Courier"/>
+              </a:rPr>
+              <a:t>paper_mass_g</a:t>
+            </a:r>
+            <a:r>
+              <a:rPr/>
+              <a:t> </a:t>
             </a:r>
             <a:r>
               <a:rPr i="1"/>
@@ -8051,80 +8155,6 @@
             </a:r>
           </a:p>
           <a:p>
-            <a:pPr lvl="0"/>
-            <a:r>
-              <a:rPr>
-                <a:latin typeface="Courier"/>
-              </a:rPr>
-              <a:t>side</a:t>
-            </a:r>
-            <a:r>
-              <a:rPr/>
-              <a:t> — </a:t>
-            </a:r>
-            <a:r>
-              <a:rPr>
-                <a:latin typeface="Courier"/>
-              </a:rPr>
-              <a:t>"sunny"</a:t>
-            </a:r>
-            <a:r>
-              <a:rPr/>
-              <a:t> / </a:t>
-            </a:r>
-            <a:r>
-              <a:rPr>
-                <a:latin typeface="Courier"/>
-              </a:rPr>
-              <a:t>"shady"</a:t>
-            </a:r>
-            <a:r>
-              <a:rPr/>
-              <a:t> </a:t>
-            </a:r>
-            <a:r>
-              <a:rPr i="1"/>
-              <a:t>(character)</a:t>
-            </a:r>
-          </a:p>
-          <a:p>
-            <a:pPr lvl="0"/>
-            <a:r>
-              <a:rPr>
-                <a:latin typeface="Courier"/>
-              </a:rPr>
-              <a:t>weight_g</a:t>
-            </a:r>
-            <a:r>
-              <a:rPr/>
-              <a:t>, </a:t>
-            </a:r>
-            <a:r>
-              <a:rPr>
-                <a:latin typeface="Courier"/>
-              </a:rPr>
-              <a:t>width_cm</a:t>
-            </a:r>
-            <a:r>
-              <a:rPr/>
-              <a:t>, </a:t>
-            </a:r>
-            <a:r>
-              <a:rPr>
-                <a:latin typeface="Courier"/>
-              </a:rPr>
-              <a:t>height_cm</a:t>
-            </a:r>
-            <a:r>
-              <a:rPr/>
-              <a:t> </a:t>
-            </a:r>
-            <a:r>
-              <a:rPr i="1"/>
-              <a:t>(numeric)</a:t>
-            </a:r>
-          </a:p>
-          <a:p>
             <a:pPr lvl="0" indent="0" marL="0">
               <a:buNone/>
             </a:pPr>
@@ -8172,7 +8202,7 @@
                 </a:solidFill>
                 <a:latin typeface="Courier"/>
               </a:rPr>
-              <a:t>weight_g     </a:t>
+              <a:t>mass_g     </a:t>
             </a:r>
             <a:r>
               <a:rPr>
@@ -8181,7 +8211,7 @@
                 </a:solidFill>
                 <a:latin typeface="Courier"/>
               </a:rPr>
-              <a:t># just the weights, as a vector</a:t>
+              <a:t># just the leaf masses, as a vector</a:t>
             </a:r>
           </a:p>
           <a:p>
@@ -8274,7 +8304,7 @@
             </a:pPr>
             <a:r>
               <a:rPr/>
-              <a:t>Diagram of a data frame as columns of vectors: a side column (character), weight_g column (numeric), and height_cm column (numeric), with rows lining up across columns.</a:t>
+              <a:t>Diagram of a data frame as columns of vectors: a shade column (character), mass_g column (numeric), and petiole_mm column (numeric), with rows lining up across columns.</a:t>
             </a:r>
           </a:p>
         </p:txBody>
@@ -8442,7 +8472,7 @@
                 </a:solidFill>
                 <a:latin typeface="Courier"/>
               </a:rPr>
-              <a:t># rows, columns  → 20  5</a:t>
+              <a:t># rows, columns  → 41  8</a:t>
             </a:r>
             <a:br/>
             <a:r>
@@ -8591,7 +8621,7 @@
               <a:rPr sz="2000">
                 <a:latin typeface="Courier"/>
               </a:rPr>
-              <a:t>side</a:t>
+              <a:t>shade</a:t>
             </a:r>
             <a:r>
               <a:rPr sz="2000"/>
@@ -9187,7 +9217,7 @@
             </a:pPr>
             <a:r>
               <a:rPr/>
-              <a:t>Diagram of the pipe operator: tree_df flows down into filter(side == “sunny”), then flows down into summary(), read as “take tree_df, then filter, then summarise.”</a:t>
+              <a:t>Diagram of the pipe operator: tree_df flows down into filter(shade == “sunny”), then flows down into summary(), read as “take tree_df, then filter, then summarise.”</a:t>
             </a:r>
           </a:p>
         </p:txBody>
@@ -9450,7 +9480,7 @@
                 </a:solidFill>
                 <a:latin typeface="Courier"/>
               </a:rPr>
-              <a:t> side, </a:t>
+              <a:t> shade, </a:t>
             </a:r>
             <a:r>
               <a:rPr>
@@ -9468,7 +9498,7 @@
                 </a:solidFill>
                 <a:latin typeface="Courier"/>
               </a:rPr>
-              <a:t> weight_g))</a:t>
+              <a:t> mass_g))</a:t>
             </a:r>
           </a:p>
           <a:p>
@@ -9586,7 +9616,7 @@
                 </a:solidFill>
                 <a:latin typeface="Courier"/>
               </a:rPr>
-              <a:t> side, </a:t>
+              <a:t> shade, </a:t>
             </a:r>
             <a:r>
               <a:rPr>
@@ -9604,7 +9634,7 @@
                 </a:solidFill>
                 <a:latin typeface="Courier"/>
               </a:rPr>
-              <a:t> weight_g)) </a:t>
+              <a:t> mass_g)) </a:t>
             </a:r>
             <a:r>
               <a:rPr>
@@ -9853,7 +9883,7 @@
               <a:rPr>
                 <a:latin typeface="Courier"/>
               </a:rPr>
-              <a:t>side</a:t>
+              <a:t>shade</a:t>
             </a:r>
             <a:r>
               <a:rPr/>
@@ -9924,7 +9954,7 @@
                 </a:solidFill>
                 <a:latin typeface="Courier"/>
               </a:rPr>
-              <a:t> side, </a:t>
+              <a:t> shade, </a:t>
             </a:r>
             <a:r>
               <a:rPr>
@@ -9942,7 +9972,7 @@
                 </a:solidFill>
                 <a:latin typeface="Courier"/>
               </a:rPr>
-              <a:t> weight_g)) </a:t>
+              <a:t> mass_g)) </a:t>
             </a:r>
             <a:r>
               <a:rPr>
@@ -10434,7 +10464,7 @@
                 </a:solidFill>
                 <a:latin typeface="Courier"/>
               </a:rPr>
-              <a:t>"Leaf weight (g)"</a:t>
+              <a:t>"Leaf mass (g)"</a:t>
             </a:r>
             <a:r>
               <a:rPr>
@@ -10522,7 +10552,7 @@
               <a:rPr sz="2000">
                 <a:latin typeface="Courier"/>
               </a:rPr>
-              <a:t>weight_g</a:t>
+              <a:t>mass_g</a:t>
             </a:r>
             <a:r>
               <a:rPr sz="2000"/>
@@ -10532,7 +10562,7 @@
               <a:rPr sz="2000">
                 <a:latin typeface="Courier"/>
               </a:rPr>
-              <a:t>height_cm</a:t>
+              <a:t>thickness_mm</a:t>
             </a:r>
             <a:r>
               <a:rPr sz="2000"/>
@@ -10733,7 +10763,7 @@
                 </a:solidFill>
                 <a:latin typeface="Courier"/>
               </a:rPr>
-              <a:t> side, </a:t>
+              <a:t> shade, </a:t>
             </a:r>
             <a:r>
               <a:rPr>
@@ -10751,7 +10781,7 @@
                 </a:solidFill>
                 <a:latin typeface="Courier"/>
               </a:rPr>
-              <a:t> weight_g)) </a:t>
+              <a:t> mass_g)) </a:t>
             </a:r>
             <a:r>
               <a:rPr>
@@ -10827,7 +10857,7 @@
                 </a:solidFill>
                 <a:latin typeface="Courier"/>
               </a:rPr>
-              <a:t>"figures/leaf_weight.png"</a:t>
+              <a:t>"figures/leaf_mass.png"</a:t>
             </a:r>
             <a:r>
               <a:rPr>
@@ -11188,7 +11218,7 @@
             </a:pPr>
             <a:r>
               <a:rPr sz="2000"/>
-              <a:t>Screenshot of the Save Plot dialog in Positron’s Plots pane, with the leaf weight boxplot ready to save as a PNG.</a:t>
+              <a:t>Screenshot of the Save Plot dialog in Positron’s Plots pane, with the leaf mass boxplot ready to save as a PNG.</a:t>
             </a:r>
           </a:p>
           <a:p>
@@ -11197,7 +11227,7 @@
             </a:pPr>
             <a:r>
               <a:rPr sz="2000"/>
-              <a:t>Screenshot of the Save Plot dialog in Positron’s Plots pane, with the leaf weight boxplot ready to save as a PNG.</a:t>
+              <a:t>Screenshot of the Save Plot dialog in Positron’s Plots pane, with the leaf mass boxplot ready to save as a PNG.</a:t>
             </a:r>
           </a:p>
         </p:txBody>
@@ -11516,7 +11546,7 @@
               <a:rPr sz="2000">
                 <a:latin typeface="Courier"/>
               </a:rPr>
-              <a:t>width_cm</a:t>
+              <a:t>petiole_mm</a:t>
             </a:r>
             <a:r>
               <a:rPr sz="2000"/>
@@ -11526,7 +11556,7 @@
               <a:rPr sz="2000">
                 <a:latin typeface="Courier"/>
               </a:rPr>
-              <a:t>side</a:t>
+              <a:t>shade</a:t>
             </a:r>
             <a:r>
               <a:rPr sz="2000"/>
